--- a/public/fun/cards/food/food-39.pptx
+++ b/public/fun/cards/food/food-39.pptx
@@ -3085,7 +3085,7 @@
     <p:bg>
       <p:bgPr>
         <a:solidFill>
-          <a:srgbClr val="FBF8F2"/>
+          <a:srgbClr val="E6F1FF"/>
         </a:solidFill>
         <a:effectLst/>
       </p:bgPr>
@@ -3099,20 +3099,20 @@
       <p:grpSpPr/>
       <p:sp>
         <p:nvSpPr>
-          <p:cNvPr id="2" name="Rectangle 1"/>
+          <p:cNvPr id="2" name="Oval 1"/>
           <p:cNvSpPr/>
           <p:nvPr/>
         </p:nvSpPr>
         <p:spPr>
           <a:xfrm>
-            <a:off x="2196000" y="0"/>
-            <a:ext cx="1044000" cy="1800000"/>
+            <a:off x="1591200" y="208800"/>
+            <a:ext cx="57600" cy="57600"/>
           </a:xfrm>
-          <a:prstGeom prst="rect">
+          <a:prstGeom prst="ellipse">
             <a:avLst/>
           </a:prstGeom>
           <a:solidFill>
-            <a:srgbClr val="3B7D91"/>
+            <a:srgbClr val="0077FF"/>
           </a:solidFill>
           <a:ln>
             <a:noFill/>
@@ -3128,170 +3128,14 @@
       </p:sp>
       <p:sp>
         <p:nvSpPr>
-          <p:cNvPr id="3" name="Freeform 2"/>
-          <p:cNvSpPr/>
+          <p:cNvPr id="3" name="텍스트"/>
+          <p:cNvSpPr txBox="1"/>
           <p:nvPr/>
         </p:nvSpPr>
         <p:spPr>
           <a:xfrm>
-            <a:off x="2516400" y="720000"/>
-            <a:ext cx="403200" cy="171360"/>
-          </a:xfrm>
-          <a:custGeom>
-            <a:avLst/>
-            <a:gdLst/>
-            <a:ahLst/>
-            <a:cxnLst/>
-            <a:rect l="l" t="t" r="r" b="b"/>
-            <a:pathLst>
-              <a:path w="403200" h="171360">
-                <a:moveTo>
-                  <a:pt x="403200" y="0"/>
-                </a:moveTo>
-                <a:lnTo>
-                  <a:pt x="398145" y="38131"/>
-                </a:lnTo>
-                <a:lnTo>
-                  <a:pt x="383235" y="74350"/>
-                </a:lnTo>
-                <a:lnTo>
-                  <a:pt x="359217" y="106841"/>
-                </a:lnTo>
-                <a:lnTo>
-                  <a:pt x="327296" y="133975"/>
-                </a:lnTo>
-                <a:lnTo>
-                  <a:pt x="289071" y="154390"/>
-                </a:lnTo>
-                <a:lnTo>
-                  <a:pt x="246460" y="167064"/>
-                </a:lnTo>
-                <a:lnTo>
-                  <a:pt x="201600" y="171360"/>
-                </a:lnTo>
-                <a:lnTo>
-                  <a:pt x="156740" y="167064"/>
-                </a:lnTo>
-                <a:lnTo>
-                  <a:pt x="114129" y="154390"/>
-                </a:lnTo>
-                <a:lnTo>
-                  <a:pt x="75904" y="133975"/>
-                </a:lnTo>
-                <a:lnTo>
-                  <a:pt x="43983" y="106841"/>
-                </a:lnTo>
-                <a:lnTo>
-                  <a:pt x="19965" y="74350"/>
-                </a:lnTo>
-                <a:lnTo>
-                  <a:pt x="5055" y="38131"/>
-                </a:lnTo>
-                <a:lnTo>
-                  <a:pt x="0" y="0"/>
-                </a:lnTo>
-                <a:close/>
-              </a:path>
-            </a:pathLst>
-          </a:custGeom>
-          <a:solidFill>
-            <a:srgbClr val="FFFFFF"/>
-          </a:solidFill>
-          <a:ln>
-            <a:noFill/>
-          </a:ln>
-        </p:spPr>
-        <p:txBody>
-          <a:bodyPr rtlCol="0" anchor="ctr"/>
-          <a:lstStyle/>
-          <a:p>
-            <a:pPr algn="ctr"/>
-          </a:p>
-        </p:txBody>
-      </p:sp>
-      <p:sp>
-        <p:nvSpPr>
-          <p:cNvPr id="4" name="Rounded Rectangle 3"/>
-          <p:cNvSpPr/>
-          <p:nvPr/>
-        </p:nvSpPr>
-        <p:spPr>
-          <a:xfrm>
-            <a:off x="2586960" y="886320"/>
-            <a:ext cx="262080" cy="35280"/>
-          </a:xfrm>
-          <a:prstGeom prst="roundRect">
-            <a:avLst>
-              <a:gd name="adj" fmla="val 42857"/>
-            </a:avLst>
-          </a:prstGeom>
-          <a:solidFill>
-            <a:srgbClr val="737373"/>
-          </a:solidFill>
-          <a:ln>
-            <a:noFill/>
-          </a:ln>
-        </p:spPr>
-        <p:txBody>
-          <a:bodyPr rtlCol="0" anchor="ctr"/>
-          <a:lstStyle/>
-          <a:p>
-            <a:pPr algn="ctr"/>
-          </a:p>
-        </p:txBody>
-      </p:sp>
-      <p:cxnSp>
-        <p:nvCxnSpPr>
-          <p:cNvPr id="5" name="Connector 4"/>
-          <p:cNvCxnSpPr/>
-          <p:nvPr/>
-        </p:nvCxnSpPr>
-        <p:spPr>
-          <a:xfrm>
-            <a:off x="2687760" y="548640"/>
-            <a:ext cx="181440" cy="151200"/>
-          </a:xfrm>
-          <a:prstGeom prst="line">
-            <a:avLst/>
-          </a:prstGeom>
-          <a:ln w="25200">
-            <a:solidFill>
-              <a:srgbClr val="737373"/>
-            </a:solidFill>
-          </a:ln>
-        </p:spPr>
-      </p:cxnSp>
-      <p:cxnSp>
-        <p:nvCxnSpPr>
-          <p:cNvPr id="6" name="Connector 5"/>
-          <p:cNvCxnSpPr/>
-          <p:nvPr/>
-        </p:nvCxnSpPr>
-        <p:spPr>
-          <a:xfrm>
-            <a:off x="2748240" y="548640"/>
-            <a:ext cx="171360" cy="131040"/>
-          </a:xfrm>
-          <a:prstGeom prst="line">
-            <a:avLst/>
-          </a:prstGeom>
-          <a:ln w="25200">
-            <a:solidFill>
-              <a:srgbClr val="737373"/>
-            </a:solidFill>
-          </a:ln>
-        </p:spPr>
-      </p:cxnSp>
-      <p:sp>
-        <p:nvSpPr>
-          <p:cNvPr id="7" name="텍스트"/>
-          <p:cNvSpPr txBox="1"/>
-          <p:nvPr/>
-        </p:nvSpPr>
-        <p:spPr>
-          <a:xfrm>
-            <a:off x="2268000" y="1224000"/>
-            <a:ext cx="900000" cy="216000"/>
+            <a:off x="360000" y="468000"/>
+            <a:ext cx="2520000" cy="360000"/>
           </a:xfrm>
           <a:prstGeom prst="rect">
             <a:avLst/>
@@ -3306,32 +3150,32 @@
           <a:p>
             <a:pPr algn="ctr">
               <a:lnSpc>
-                <a:spcPts val="1160"/>
+                <a:spcPts val="3190"/>
               </a:lnSpc>
             </a:pPr>
             <a:r>
-              <a:rPr sz="800" b="1" spc="150">
+              <a:rPr sz="2200" b="1">
                 <a:solidFill>
-                  <a:srgbClr val="FFFFFF"/>
+                  <a:srgbClr val="12151C"/>
                 </a:solidFill>
                 <a:latin typeface="맑은 고딕"/>
                 <a:ea typeface="맑은 고딕"/>
               </a:rPr>
-              <a:t>상호명</a:t>
-            </a:r>
-          </a:p>
-        </p:txBody>
-      </p:sp>
-      <p:sp>
-        <p:nvSpPr>
-          <p:cNvPr id="8" name="텍스트"/>
+              <a:t>곽도하</a:t>
+            </a:r>
+          </a:p>
+        </p:txBody>
+      </p:sp>
+      <p:sp>
+        <p:nvSpPr>
+          <p:cNvPr id="4" name="텍스트"/>
           <p:cNvSpPr txBox="1"/>
           <p:nvPr/>
         </p:nvSpPr>
         <p:spPr>
           <a:xfrm>
-            <a:off x="216000" y="331200"/>
-            <a:ext cx="1872000" cy="313692"/>
+            <a:off x="360000" y="878400"/>
+            <a:ext cx="2520000" cy="171451"/>
           </a:xfrm>
           <a:prstGeom prst="rect">
             <a:avLst/>
@@ -3344,34 +3188,63 @@
           </a:bodyPr>
           <a:lstStyle/>
           <a:p>
-            <a:pPr algn="l">
+            <a:pPr algn="ctr">
               <a:lnSpc>
-                <a:spcPts val="2755"/>
+                <a:spcPts val="1305"/>
               </a:lnSpc>
             </a:pPr>
             <a:r>
-              <a:rPr sz="1900" b="1" spc="50">
+              <a:rPr sz="900" b="0">
                 <a:solidFill>
-                  <a:srgbClr val="544212"/>
+                  <a:srgbClr val="0B3A72"/>
                 </a:solidFill>
                 <a:latin typeface="맑은 고딕"/>
                 <a:ea typeface="맑은 고딕"/>
               </a:rPr>
-              <a:t>곽도하</a:t>
-            </a:r>
-          </a:p>
-        </p:txBody>
-      </p:sp>
-      <p:sp>
-        <p:nvSpPr>
-          <p:cNvPr id="9" name="텍스트"/>
+              <a:t>브런치 카페 대표</a:t>
+            </a:r>
+          </a:p>
+        </p:txBody>
+      </p:sp>
+      <p:sp>
+        <p:nvSpPr>
+          <p:cNvPr id="5" name="Rectangle 4"/>
+          <p:cNvSpPr/>
+          <p:nvPr/>
+        </p:nvSpPr>
+        <p:spPr>
+          <a:xfrm>
+            <a:off x="1530000" y="1137600"/>
+            <a:ext cx="180000" cy="14400"/>
+          </a:xfrm>
+          <a:prstGeom prst="rect">
+            <a:avLst/>
+          </a:prstGeom>
+          <a:solidFill>
+            <a:srgbClr val="0077FF"/>
+          </a:solidFill>
+          <a:ln>
+            <a:noFill/>
+          </a:ln>
+        </p:spPr>
+        <p:txBody>
+          <a:bodyPr rtlCol="0" anchor="ctr"/>
+          <a:lstStyle/>
+          <a:p>
+            <a:pPr algn="ctr"/>
+          </a:p>
+        </p:txBody>
+      </p:sp>
+      <p:sp>
+        <p:nvSpPr>
+          <p:cNvPr id="6" name="텍스트"/>
           <p:cNvSpPr txBox="1"/>
           <p:nvPr/>
         </p:nvSpPr>
         <p:spPr>
           <a:xfrm>
-            <a:off x="216000" y="619200"/>
-            <a:ext cx="1872000" cy="122400"/>
+            <a:off x="360000" y="1267200"/>
+            <a:ext cx="2520000" cy="133351"/>
           </a:xfrm>
           <a:prstGeom prst="rect">
             <a:avLst/>
@@ -3384,63 +3257,34 @@
           </a:bodyPr>
           <a:lstStyle/>
           <a:p>
-            <a:pPr algn="l">
+            <a:pPr algn="ctr">
               <a:lnSpc>
-                <a:spcPts val="1232"/>
+                <a:spcPts val="1015"/>
               </a:lnSpc>
             </a:pPr>
             <a:r>
-              <a:rPr sz="850" b="1">
+              <a:rPr sz="700" b="0">
                 <a:solidFill>
-                  <a:srgbClr val="38778A"/>
+                  <a:srgbClr val="12151C"/>
                 </a:solidFill>
                 <a:latin typeface="맑은 고딕"/>
                 <a:ea typeface="맑은 고딕"/>
               </a:rPr>
-              <a:t>브런치 카페 대표</a:t>
-            </a:r>
-          </a:p>
-        </p:txBody>
-      </p:sp>
-      <p:sp>
-        <p:nvSpPr>
-          <p:cNvPr id="10" name="Rectangle 9"/>
-          <p:cNvSpPr/>
+              <a:t>010-1234-5678      name@example.com</a:t>
+            </a:r>
+          </a:p>
+        </p:txBody>
+      </p:sp>
+      <p:sp>
+        <p:nvSpPr>
+          <p:cNvPr id="7" name="텍스트"/>
+          <p:cNvSpPr txBox="1"/>
           <p:nvPr/>
         </p:nvSpPr>
         <p:spPr>
           <a:xfrm>
-            <a:off x="216000" y="828000"/>
-            <a:ext cx="201600" cy="14400"/>
-          </a:xfrm>
-          <a:prstGeom prst="rect">
-            <a:avLst/>
-          </a:prstGeom>
-          <a:solidFill>
-            <a:srgbClr val="3B7D91"/>
-          </a:solidFill>
-          <a:ln>
-            <a:noFill/>
-          </a:ln>
-        </p:spPr>
-        <p:txBody>
-          <a:bodyPr rtlCol="0" anchor="ctr"/>
-          <a:lstStyle/>
-          <a:p>
-            <a:pPr algn="ctr"/>
-          </a:p>
-        </p:txBody>
-      </p:sp>
-      <p:sp>
-        <p:nvSpPr>
-          <p:cNvPr id="11" name="텍스트"/>
-          <p:cNvSpPr txBox="1"/>
-          <p:nvPr/>
-        </p:nvSpPr>
-        <p:spPr>
-          <a:xfrm>
-            <a:off x="216000" y="1008000"/>
-            <a:ext cx="122400" cy="168911"/>
+            <a:off x="360000" y="1425600"/>
+            <a:ext cx="2520000" cy="133351"/>
           </a:xfrm>
           <a:prstGeom prst="rect">
             <a:avLst/>
@@ -3453,34 +3297,34 @@
           </a:bodyPr>
           <a:lstStyle/>
           <a:p>
-            <a:pPr algn="l">
+            <a:pPr algn="ctr">
               <a:lnSpc>
                 <a:spcPts val="1015"/>
               </a:lnSpc>
             </a:pPr>
             <a:r>
-              <a:rPr sz="700" b="1">
+              <a:rPr sz="700" b="0">
                 <a:solidFill>
-                  <a:srgbClr val="38778A"/>
+                  <a:srgbClr val="0B3A72"/>
                 </a:solidFill>
                 <a:latin typeface="맑은 고딕"/>
                 <a:ea typeface="맑은 고딕"/>
               </a:rPr>
-              <a:t>T</a:t>
-            </a:r>
-          </a:p>
-        </p:txBody>
-      </p:sp>
-      <p:sp>
-        <p:nvSpPr>
-          <p:cNvPr id="12" name="텍스트"/>
+              <a:t>주소를 입력해 주세요</a:t>
+            </a:r>
+          </a:p>
+        </p:txBody>
+      </p:sp>
+      <p:sp>
+        <p:nvSpPr>
+          <p:cNvPr id="8" name="텍스트"/>
           <p:cNvSpPr txBox="1"/>
           <p:nvPr/>
         </p:nvSpPr>
         <p:spPr>
           <a:xfrm>
-            <a:off x="360000" y="1008000"/>
-            <a:ext cx="1584000" cy="168911"/>
+            <a:off x="360000" y="1576800"/>
+            <a:ext cx="2520000" cy="104776"/>
           </a:xfrm>
           <a:prstGeom prst="rect">
             <a:avLst/>
@@ -3493,180 +3337,20 @@
           </a:bodyPr>
           <a:lstStyle/>
           <a:p>
-            <a:pPr algn="l">
+            <a:pPr algn="ctr">
               <a:lnSpc>
-                <a:spcPts val="1015"/>
+                <a:spcPts val="797"/>
               </a:lnSpc>
             </a:pPr>
             <a:r>
-              <a:rPr sz="700" b="0">
+              <a:rPr sz="550" b="1" spc="300">
                 <a:solidFill>
-                  <a:srgbClr val="544212"/>
+                  <a:srgbClr val="0B3A72"/>
                 </a:solidFill>
                 <a:latin typeface="맑은 고딕"/>
                 <a:ea typeface="맑은 고딕"/>
               </a:rPr>
-              <a:t>010-1234-5678</a:t>
-            </a:r>
-          </a:p>
-        </p:txBody>
-      </p:sp>
-      <p:sp>
-        <p:nvSpPr>
-          <p:cNvPr id="13" name="텍스트"/>
-          <p:cNvSpPr txBox="1"/>
-          <p:nvPr/>
-        </p:nvSpPr>
-        <p:spPr>
-          <a:xfrm>
-            <a:off x="216000" y="1176911"/>
-            <a:ext cx="122400" cy="168911"/>
-          </a:xfrm>
-          <a:prstGeom prst="rect">
-            <a:avLst/>
-          </a:prstGeom>
-          <a:noFill/>
-        </p:spPr>
-        <p:txBody>
-          <a:bodyPr wrap="square" lIns="0" rIns="0" tIns="0" bIns="0" anchor="t">
-            <a:spAutoFit/>
-          </a:bodyPr>
-          <a:lstStyle/>
-          <a:p>
-            <a:pPr algn="l">
-              <a:lnSpc>
-                <a:spcPts val="1015"/>
-              </a:lnSpc>
-            </a:pPr>
-            <a:r>
-              <a:rPr sz="700" b="1">
-                <a:solidFill>
-                  <a:srgbClr val="38778A"/>
-                </a:solidFill>
-                <a:latin typeface="맑은 고딕"/>
-                <a:ea typeface="맑은 고딕"/>
-              </a:rPr>
-              <a:t>E</a:t>
-            </a:r>
-          </a:p>
-        </p:txBody>
-      </p:sp>
-      <p:sp>
-        <p:nvSpPr>
-          <p:cNvPr id="14" name="텍스트"/>
-          <p:cNvSpPr txBox="1"/>
-          <p:nvPr/>
-        </p:nvSpPr>
-        <p:spPr>
-          <a:xfrm>
-            <a:off x="360000" y="1176911"/>
-            <a:ext cx="1584000" cy="168911"/>
-          </a:xfrm>
-          <a:prstGeom prst="rect">
-            <a:avLst/>
-          </a:prstGeom>
-          <a:noFill/>
-        </p:spPr>
-        <p:txBody>
-          <a:bodyPr wrap="square" lIns="0" rIns="0" tIns="0" bIns="0" anchor="t">
-            <a:spAutoFit/>
-          </a:bodyPr>
-          <a:lstStyle/>
-          <a:p>
-            <a:pPr algn="l">
-              <a:lnSpc>
-                <a:spcPts val="1015"/>
-              </a:lnSpc>
-            </a:pPr>
-            <a:r>
-              <a:rPr sz="700" b="0">
-                <a:solidFill>
-                  <a:srgbClr val="544212"/>
-                </a:solidFill>
-                <a:latin typeface="맑은 고딕"/>
-                <a:ea typeface="맑은 고딕"/>
-              </a:rPr>
-              <a:t>name@example.com</a:t>
-            </a:r>
-          </a:p>
-        </p:txBody>
-      </p:sp>
-      <p:sp>
-        <p:nvSpPr>
-          <p:cNvPr id="15" name="텍스트"/>
-          <p:cNvSpPr txBox="1"/>
-          <p:nvPr/>
-        </p:nvSpPr>
-        <p:spPr>
-          <a:xfrm>
-            <a:off x="216000" y="1345822"/>
-            <a:ext cx="122400" cy="168911"/>
-          </a:xfrm>
-          <a:prstGeom prst="rect">
-            <a:avLst/>
-          </a:prstGeom>
-          <a:noFill/>
-        </p:spPr>
-        <p:txBody>
-          <a:bodyPr wrap="square" lIns="0" rIns="0" tIns="0" bIns="0" anchor="t">
-            <a:spAutoFit/>
-          </a:bodyPr>
-          <a:lstStyle/>
-          <a:p>
-            <a:pPr algn="l">
-              <a:lnSpc>
-                <a:spcPts val="1015"/>
-              </a:lnSpc>
-            </a:pPr>
-            <a:r>
-              <a:rPr sz="700" b="1">
-                <a:solidFill>
-                  <a:srgbClr val="38778A"/>
-                </a:solidFill>
-                <a:latin typeface="맑은 고딕"/>
-                <a:ea typeface="맑은 고딕"/>
-              </a:rPr>
-              <a:t>A</a:t>
-            </a:r>
-          </a:p>
-        </p:txBody>
-      </p:sp>
-      <p:sp>
-        <p:nvSpPr>
-          <p:cNvPr id="16" name="텍스트"/>
-          <p:cNvSpPr txBox="1"/>
-          <p:nvPr/>
-        </p:nvSpPr>
-        <p:spPr>
-          <a:xfrm>
-            <a:off x="360000" y="1345822"/>
-            <a:ext cx="1584000" cy="168911"/>
-          </a:xfrm>
-          <a:prstGeom prst="rect">
-            <a:avLst/>
-          </a:prstGeom>
-          <a:noFill/>
-        </p:spPr>
-        <p:txBody>
-          <a:bodyPr wrap="square" lIns="0" rIns="0" tIns="0" bIns="0" anchor="t">
-            <a:spAutoFit/>
-          </a:bodyPr>
-          <a:lstStyle/>
-          <a:p>
-            <a:pPr algn="l">
-              <a:lnSpc>
-                <a:spcPts val="1015"/>
-              </a:lnSpc>
-            </a:pPr>
-            <a:r>
-              <a:rPr sz="700" b="0">
-                <a:solidFill>
-                  <a:srgbClr val="544212"/>
-                </a:solidFill>
-                <a:latin typeface="맑은 고딕"/>
-                <a:ea typeface="맑은 고딕"/>
-              </a:rPr>
-              <a:t>주소를 입력해 주세요</a:t>
+              <a:t>상호명</a:t>
             </a:r>
           </a:p>
         </p:txBody>
@@ -3685,7 +3369,7 @@
     <p:bg>
       <p:bgPr>
         <a:solidFill>
-          <a:srgbClr val="FFFFFF"/>
+          <a:srgbClr val="E6F1FF"/>
         </a:solidFill>
         <a:effectLst/>
       </p:bgPr>
@@ -3699,74 +3383,20 @@
       <p:grpSpPr/>
       <p:sp>
         <p:nvSpPr>
-          <p:cNvPr id="2" name="Freeform 1"/>
+          <p:cNvPr id="2" name="Oval 1"/>
           <p:cNvSpPr/>
           <p:nvPr/>
         </p:nvSpPr>
         <p:spPr>
           <a:xfrm>
-            <a:off x="986400" y="900000"/>
-            <a:ext cx="1267200" cy="538560"/>
+            <a:off x="1591200" y="511200"/>
+            <a:ext cx="57600" cy="57600"/>
           </a:xfrm>
-          <a:custGeom>
+          <a:prstGeom prst="ellipse">
             <a:avLst/>
-            <a:gdLst/>
-            <a:ahLst/>
-            <a:cxnLst/>
-            <a:rect l="l" t="t" r="r" b="b"/>
-            <a:pathLst>
-              <a:path w="1267200" h="538560">
-                <a:moveTo>
-                  <a:pt x="1267200" y="0"/>
-                </a:moveTo>
-                <a:lnTo>
-                  <a:pt x="1251314" y="119841"/>
-                </a:lnTo>
-                <a:lnTo>
-                  <a:pt x="1204454" y="233672"/>
-                </a:lnTo>
-                <a:lnTo>
-                  <a:pt x="1128968" y="335787"/>
-                </a:lnTo>
-                <a:lnTo>
-                  <a:pt x="1028643" y="421063"/>
-                </a:lnTo>
-                <a:lnTo>
-                  <a:pt x="908509" y="485226"/>
-                </a:lnTo>
-                <a:lnTo>
-                  <a:pt x="774589" y="525057"/>
-                </a:lnTo>
-                <a:lnTo>
-                  <a:pt x="633600" y="538560"/>
-                </a:lnTo>
-                <a:lnTo>
-                  <a:pt x="492611" y="525057"/>
-                </a:lnTo>
-                <a:lnTo>
-                  <a:pt x="358691" y="485226"/>
-                </a:lnTo>
-                <a:lnTo>
-                  <a:pt x="238557" y="421063"/>
-                </a:lnTo>
-                <a:lnTo>
-                  <a:pt x="138232" y="335787"/>
-                </a:lnTo>
-                <a:lnTo>
-                  <a:pt x="62746" y="233672"/>
-                </a:lnTo>
-                <a:lnTo>
-                  <a:pt x="15886" y="119841"/>
-                </a:lnTo>
-                <a:lnTo>
-                  <a:pt x="0" y="0"/>
-                </a:lnTo>
-                <a:close/>
-              </a:path>
-            </a:pathLst>
-          </a:custGeom>
+          </a:prstGeom>
           <a:solidFill>
-            <a:srgbClr val="A78425"/>
+            <a:srgbClr val="0077FF"/>
           </a:solidFill>
           <a:ln>
             <a:noFill/>
@@ -3782,118 +3412,14 @@
       </p:sp>
       <p:sp>
         <p:nvSpPr>
-          <p:cNvPr id="3" name="Rounded Rectangle 2"/>
-          <p:cNvSpPr/>
+          <p:cNvPr id="3" name="텍스트"/>
+          <p:cNvSpPr txBox="1"/>
           <p:nvPr/>
         </p:nvSpPr>
         <p:spPr>
           <a:xfrm>
-            <a:off x="1208160" y="1422720"/>
-            <a:ext cx="823680" cy="110880"/>
-          </a:xfrm>
-          <a:prstGeom prst="roundRect">
-            <a:avLst>
-              <a:gd name="adj" fmla="val 42857"/>
-            </a:avLst>
-          </a:prstGeom>
-          <a:solidFill>
-            <a:srgbClr val="F6EACB"/>
-          </a:solidFill>
-          <a:ln>
-            <a:noFill/>
-          </a:ln>
-        </p:spPr>
-        <p:txBody>
-          <a:bodyPr rtlCol="0" anchor="ctr"/>
-          <a:lstStyle/>
-          <a:p>
-            <a:pPr algn="ctr"/>
-          </a:p>
-        </p:txBody>
-      </p:sp>
-      <p:cxnSp>
-        <p:nvCxnSpPr>
-          <p:cNvPr id="4" name="Connector 3"/>
-          <p:cNvCxnSpPr/>
-          <p:nvPr/>
-        </p:nvCxnSpPr>
-        <p:spPr>
-          <a:xfrm>
-            <a:off x="1524960" y="361440"/>
-            <a:ext cx="570240" cy="475200"/>
-          </a:xfrm>
-          <a:prstGeom prst="line">
-            <a:avLst/>
-          </a:prstGeom>
-          <a:ln w="79200">
-            <a:solidFill>
-              <a:srgbClr val="F6EACB"/>
-            </a:solidFill>
-          </a:ln>
-        </p:spPr>
-      </p:cxnSp>
-      <p:cxnSp>
-        <p:nvCxnSpPr>
-          <p:cNvPr id="5" name="Connector 4"/>
-          <p:cNvCxnSpPr/>
-          <p:nvPr/>
-        </p:nvCxnSpPr>
-        <p:spPr>
-          <a:xfrm>
-            <a:off x="1715040" y="361440"/>
-            <a:ext cx="538560" cy="411840"/>
-          </a:xfrm>
-          <a:prstGeom prst="line">
-            <a:avLst/>
-          </a:prstGeom>
-          <a:ln w="79200">
-            <a:solidFill>
-              <a:srgbClr val="F6EACB"/>
-            </a:solidFill>
-          </a:ln>
-        </p:spPr>
-      </p:cxnSp>
-      <p:sp>
-        <p:nvSpPr>
-          <p:cNvPr id="6" name="Rectangle 5"/>
-          <p:cNvSpPr/>
-          <p:nvPr/>
-        </p:nvSpPr>
-        <p:spPr>
-          <a:xfrm>
-            <a:off x="0" y="0"/>
-            <a:ext cx="3240000" cy="1800000"/>
-          </a:xfrm>
-          <a:prstGeom prst="rect">
-            <a:avLst/>
-          </a:prstGeom>
-          <a:solidFill>
-            <a:srgbClr val="FFFFFF">
-              <a:alpha val="90000"/>
-            </a:srgbClr>
-          </a:solidFill>
-          <a:ln>
-            <a:noFill/>
-          </a:ln>
-        </p:spPr>
-        <p:txBody>
-          <a:bodyPr rtlCol="0" anchor="ctr"/>
-          <a:lstStyle/>
-          <a:p>
-            <a:pPr algn="ctr"/>
-          </a:p>
-        </p:txBody>
-      </p:sp>
-      <p:sp>
-        <p:nvSpPr>
-          <p:cNvPr id="7" name="텍스트"/>
-          <p:cNvSpPr txBox="1"/>
-          <p:nvPr/>
-        </p:nvSpPr>
-        <p:spPr>
-          <a:xfrm>
-            <a:off x="396000" y="612000"/>
-            <a:ext cx="2448000" cy="432000"/>
+            <a:off x="396000" y="684000"/>
+            <a:ext cx="2448000" cy="504000"/>
           </a:xfrm>
           <a:prstGeom prst="rect">
             <a:avLst/>
@@ -3901,7 +3427,7 @@
           <a:noFill/>
         </p:spPr>
         <p:txBody>
-          <a:bodyPr wrap="square" lIns="0" rIns="0" tIns="0" bIns="0" anchor="ctr">
+          <a:bodyPr wrap="square" lIns="0" rIns="0" tIns="0" bIns="0" anchor="t">
             <a:spAutoFit/>
           </a:bodyPr>
           <a:lstStyle/>
@@ -3914,7 +3440,7 @@
             <a:r>
               <a:rPr sz="1200" b="1">
                 <a:solidFill>
-                  <a:srgbClr val="544212"/>
+                  <a:srgbClr val="12151C"/>
                 </a:solidFill>
                 <a:latin typeface="맑은 고딕"/>
                 <a:ea typeface="맑은 고딕"/>
@@ -3926,43 +3452,14 @@
       </p:sp>
       <p:sp>
         <p:nvSpPr>
-          <p:cNvPr id="8" name="Rectangle 7"/>
-          <p:cNvSpPr/>
+          <p:cNvPr id="4" name="텍스트"/>
+          <p:cNvSpPr txBox="1"/>
           <p:nvPr/>
         </p:nvSpPr>
         <p:spPr>
           <a:xfrm>
-            <a:off x="1512000" y="1173600"/>
-            <a:ext cx="216000" cy="10800"/>
-          </a:xfrm>
-          <a:prstGeom prst="rect">
-            <a:avLst/>
-          </a:prstGeom>
-          <a:solidFill>
-            <a:srgbClr val="A78425"/>
-          </a:solidFill>
-          <a:ln>
-            <a:noFill/>
-          </a:ln>
-        </p:spPr>
-        <p:txBody>
-          <a:bodyPr rtlCol="0" anchor="ctr"/>
-          <a:lstStyle/>
-          <a:p>
-            <a:pPr algn="ctr"/>
-          </a:p>
-        </p:txBody>
-      </p:sp>
-      <p:sp>
-        <p:nvSpPr>
-          <p:cNvPr id="9" name="텍스트"/>
-          <p:cNvSpPr txBox="1"/>
-          <p:nvPr/>
-        </p:nvSpPr>
-        <p:spPr>
-          <a:xfrm>
-            <a:off x="360000" y="1288800"/>
-            <a:ext cx="2520000" cy="108000"/>
+            <a:off x="360000" y="1339200"/>
+            <a:ext cx="2520000" cy="123826"/>
           </a:xfrm>
           <a:prstGeom prst="rect">
             <a:avLst/>
@@ -3977,13 +3474,13 @@
           <a:p>
             <a:pPr algn="ctr">
               <a:lnSpc>
-                <a:spcPts val="1087"/>
+                <a:spcPts val="942"/>
               </a:lnSpc>
             </a:pPr>
             <a:r>
-              <a:rPr sz="750" b="1" spc="300">
+              <a:rPr sz="650" b="1" spc="300">
                 <a:solidFill>
-                  <a:srgbClr val="7A7056"/>
+                  <a:srgbClr val="0B3A72"/>
                 </a:solidFill>
                 <a:latin typeface="맑은 고딕"/>
                 <a:ea typeface="맑은 고딕"/>

--- a/public/fun/cards/food/food-39.pptx
+++ b/public/fun/cards/food/food-39.pptx
@@ -3097,25 +3097,193 @@
         <p:nvPr/>
       </p:nvGrpSpPr>
       <p:grpSpPr/>
-      <p:sp>
-        <p:nvSpPr>
-          <p:cNvPr id="2" name="Oval 1"/>
+      <p:cxnSp>
+        <p:nvCxnSpPr>
+          <p:cNvPr id="2" name="Connector 1"/>
+          <p:cNvCxnSpPr/>
+          <p:nvPr/>
+        </p:nvCxnSpPr>
+        <p:spPr>
+          <a:xfrm>
+            <a:off x="93600" y="122400"/>
+            <a:ext cx="57600" cy="0"/>
+          </a:xfrm>
+          <a:prstGeom prst="line">
+            <a:avLst/>
+          </a:prstGeom>
+          <a:ln w="3600">
+            <a:solidFill>
+              <a:srgbClr val="B8D9FF"/>
+            </a:solidFill>
+          </a:ln>
+        </p:spPr>
+      </p:cxnSp>
+      <p:cxnSp>
+        <p:nvCxnSpPr>
+          <p:cNvPr id="3" name="Connector 2"/>
+          <p:cNvCxnSpPr/>
+          <p:nvPr/>
+        </p:nvCxnSpPr>
+        <p:spPr>
+          <a:xfrm>
+            <a:off x="122400" y="93600"/>
+            <a:ext cx="0" cy="57600"/>
+          </a:xfrm>
+          <a:prstGeom prst="line">
+            <a:avLst/>
+          </a:prstGeom>
+          <a:ln w="3600">
+            <a:solidFill>
+              <a:srgbClr val="B8D9FF"/>
+            </a:solidFill>
+          </a:ln>
+        </p:spPr>
+      </p:cxnSp>
+      <p:cxnSp>
+        <p:nvCxnSpPr>
+          <p:cNvPr id="4" name="Connector 3"/>
+          <p:cNvCxnSpPr/>
+          <p:nvPr/>
+        </p:nvCxnSpPr>
+        <p:spPr>
+          <a:xfrm>
+            <a:off x="3088800" y="122400"/>
+            <a:ext cx="57600" cy="0"/>
+          </a:xfrm>
+          <a:prstGeom prst="line">
+            <a:avLst/>
+          </a:prstGeom>
+          <a:ln w="3600">
+            <a:solidFill>
+              <a:srgbClr val="B8D9FF"/>
+            </a:solidFill>
+          </a:ln>
+        </p:spPr>
+      </p:cxnSp>
+      <p:cxnSp>
+        <p:nvCxnSpPr>
+          <p:cNvPr id="5" name="Connector 4"/>
+          <p:cNvCxnSpPr/>
+          <p:nvPr/>
+        </p:nvCxnSpPr>
+        <p:spPr>
+          <a:xfrm>
+            <a:off x="3117600" y="93600"/>
+            <a:ext cx="0" cy="57600"/>
+          </a:xfrm>
+          <a:prstGeom prst="line">
+            <a:avLst/>
+          </a:prstGeom>
+          <a:ln w="3600">
+            <a:solidFill>
+              <a:srgbClr val="B8D9FF"/>
+            </a:solidFill>
+          </a:ln>
+        </p:spPr>
+      </p:cxnSp>
+      <p:cxnSp>
+        <p:nvCxnSpPr>
+          <p:cNvPr id="6" name="Connector 5"/>
+          <p:cNvCxnSpPr/>
+          <p:nvPr/>
+        </p:nvCxnSpPr>
+        <p:spPr>
+          <a:xfrm>
+            <a:off x="93600" y="1677600"/>
+            <a:ext cx="57600" cy="0"/>
+          </a:xfrm>
+          <a:prstGeom prst="line">
+            <a:avLst/>
+          </a:prstGeom>
+          <a:ln w="3600">
+            <a:solidFill>
+              <a:srgbClr val="B8D9FF"/>
+            </a:solidFill>
+          </a:ln>
+        </p:spPr>
+      </p:cxnSp>
+      <p:cxnSp>
+        <p:nvCxnSpPr>
+          <p:cNvPr id="7" name="Connector 6"/>
+          <p:cNvCxnSpPr/>
+          <p:nvPr/>
+        </p:nvCxnSpPr>
+        <p:spPr>
+          <a:xfrm>
+            <a:off x="122400" y="1648800"/>
+            <a:ext cx="0" cy="57600"/>
+          </a:xfrm>
+          <a:prstGeom prst="line">
+            <a:avLst/>
+          </a:prstGeom>
+          <a:ln w="3600">
+            <a:solidFill>
+              <a:srgbClr val="B8D9FF"/>
+            </a:solidFill>
+          </a:ln>
+        </p:spPr>
+      </p:cxnSp>
+      <p:cxnSp>
+        <p:nvCxnSpPr>
+          <p:cNvPr id="8" name="Connector 7"/>
+          <p:cNvCxnSpPr/>
+          <p:nvPr/>
+        </p:nvCxnSpPr>
+        <p:spPr>
+          <a:xfrm>
+            <a:off x="3088800" y="1677600"/>
+            <a:ext cx="57600" cy="0"/>
+          </a:xfrm>
+          <a:prstGeom prst="line">
+            <a:avLst/>
+          </a:prstGeom>
+          <a:ln w="3600">
+            <a:solidFill>
+              <a:srgbClr val="B8D9FF"/>
+            </a:solidFill>
+          </a:ln>
+        </p:spPr>
+      </p:cxnSp>
+      <p:cxnSp>
+        <p:nvCxnSpPr>
+          <p:cNvPr id="9" name="Connector 8"/>
+          <p:cNvCxnSpPr/>
+          <p:nvPr/>
+        </p:nvCxnSpPr>
+        <p:spPr>
+          <a:xfrm>
+            <a:off x="3117600" y="1648800"/>
+            <a:ext cx="0" cy="57600"/>
+          </a:xfrm>
+          <a:prstGeom prst="line">
+            <a:avLst/>
+          </a:prstGeom>
+          <a:ln w="3600">
+            <a:solidFill>
+              <a:srgbClr val="B8D9FF"/>
+            </a:solidFill>
+          </a:ln>
+        </p:spPr>
+      </p:cxnSp>
+      <p:sp>
+        <p:nvSpPr>
+          <p:cNvPr id="10" name="Oval 9"/>
           <p:cNvSpPr/>
           <p:nvPr/>
         </p:nvSpPr>
         <p:spPr>
           <a:xfrm>
-            <a:off x="1591200" y="208800"/>
-            <a:ext cx="57600" cy="57600"/>
+            <a:off x="1526400" y="237600"/>
+            <a:ext cx="187200" cy="187200"/>
           </a:xfrm>
           <a:prstGeom prst="ellipse">
             <a:avLst/>
           </a:prstGeom>
-          <a:solidFill>
-            <a:srgbClr val="0077FF"/>
-          </a:solidFill>
-          <a:ln>
-            <a:noFill/>
+          <a:noFill/>
+          <a:ln w="5040">
+            <a:solidFill>
+              <a:srgbClr val="0077FF"/>
+            </a:solidFill>
           </a:ln>
         </p:spPr>
         <p:txBody>
@@ -3128,14 +3296,14 @@
       </p:sp>
       <p:sp>
         <p:nvSpPr>
-          <p:cNvPr id="3" name="텍스트"/>
+          <p:cNvPr id="11" name="텍스트"/>
           <p:cNvSpPr txBox="1"/>
           <p:nvPr/>
         </p:nvSpPr>
         <p:spPr>
           <a:xfrm>
-            <a:off x="360000" y="468000"/>
-            <a:ext cx="2520000" cy="360000"/>
+            <a:off x="1476000" y="237600"/>
+            <a:ext cx="288000" cy="187200"/>
           </a:xfrm>
           <a:prstGeom prst="rect">
             <a:avLst/>
@@ -3143,6 +3311,46 @@
           <a:noFill/>
         </p:spPr>
         <p:txBody>
+          <a:bodyPr wrap="square" lIns="0" rIns="0" tIns="0" bIns="0" anchor="ctr">
+            <a:spAutoFit/>
+          </a:bodyPr>
+          <a:lstStyle/>
+          <a:p>
+            <a:pPr algn="ctr">
+              <a:lnSpc>
+                <a:spcPts val="1305"/>
+              </a:lnSpc>
+            </a:pPr>
+            <a:r>
+              <a:rPr sz="900" b="1">
+                <a:solidFill>
+                  <a:srgbClr val="0077FF"/>
+                </a:solidFill>
+                <a:latin typeface="맑은 고딕"/>
+                <a:ea typeface="맑은 고딕"/>
+              </a:rPr>
+              <a:t>상</a:t>
+            </a:r>
+          </a:p>
+        </p:txBody>
+      </p:sp>
+      <p:sp>
+        <p:nvSpPr>
+          <p:cNvPr id="12" name="텍스트"/>
+          <p:cNvSpPr txBox="1"/>
+          <p:nvPr/>
+        </p:nvSpPr>
+        <p:spPr>
+          <a:xfrm>
+            <a:off x="360000" y="540000"/>
+            <a:ext cx="2520000" cy="237600"/>
+          </a:xfrm>
+          <a:prstGeom prst="rect">
+            <a:avLst/>
+          </a:prstGeom>
+          <a:noFill/>
+        </p:spPr>
+        <p:txBody>
           <a:bodyPr wrap="square" lIns="0" rIns="0" tIns="0" bIns="0" anchor="t">
             <a:spAutoFit/>
           </a:bodyPr>
@@ -3150,11 +3358,11 @@
           <a:p>
             <a:pPr algn="ctr">
               <a:lnSpc>
-                <a:spcPts val="3190"/>
+                <a:spcPts val="1957"/>
               </a:lnSpc>
             </a:pPr>
             <a:r>
-              <a:rPr sz="2200" b="1">
+              <a:rPr sz="1350" b="1" spc="120">
                 <a:solidFill>
                   <a:srgbClr val="12151C"/>
                 </a:solidFill>
@@ -3168,14 +3376,14 @@
       </p:sp>
       <p:sp>
         <p:nvSpPr>
-          <p:cNvPr id="4" name="텍스트"/>
+          <p:cNvPr id="13" name="텍스트"/>
           <p:cNvSpPr txBox="1"/>
           <p:nvPr/>
         </p:nvSpPr>
         <p:spPr>
           <a:xfrm>
-            <a:off x="360000" y="878400"/>
-            <a:ext cx="2520000" cy="171451"/>
+            <a:off x="360000" y="792000"/>
+            <a:ext cx="2520000" cy="133351"/>
           </a:xfrm>
           <a:prstGeom prst="rect">
             <a:avLst/>
@@ -3190,11 +3398,11 @@
           <a:p>
             <a:pPr algn="ctr">
               <a:lnSpc>
-                <a:spcPts val="1305"/>
+                <a:spcPts val="1015"/>
               </a:lnSpc>
             </a:pPr>
             <a:r>
-              <a:rPr sz="900" b="0">
+              <a:rPr sz="700" b="0" spc="60">
                 <a:solidFill>
                   <a:srgbClr val="0B3A72"/>
                 </a:solidFill>
@@ -3206,45 +3414,37 @@
           </a:p>
         </p:txBody>
       </p:sp>
-      <p:sp>
-        <p:nvSpPr>
-          <p:cNvPr id="5" name="Rectangle 4"/>
-          <p:cNvSpPr/>
+      <p:cxnSp>
+        <p:nvCxnSpPr>
+          <p:cNvPr id="14" name="Connector 13"/>
+          <p:cNvCxnSpPr/>
           <p:nvPr/>
-        </p:nvSpPr>
-        <p:spPr>
-          <a:xfrm>
-            <a:off x="1530000" y="1137600"/>
-            <a:ext cx="180000" cy="14400"/>
-          </a:xfrm>
-          <a:prstGeom prst="rect">
+        </p:nvCxnSpPr>
+        <p:spPr>
+          <a:xfrm>
+            <a:off x="1440000" y="1015200"/>
+            <a:ext cx="360000" cy="0"/>
+          </a:xfrm>
+          <a:prstGeom prst="line">
             <a:avLst/>
           </a:prstGeom>
-          <a:solidFill>
-            <a:srgbClr val="0077FF"/>
-          </a:solidFill>
-          <a:ln>
-            <a:noFill/>
+          <a:ln w="7920">
+            <a:solidFill>
+              <a:srgbClr val="0077FF"/>
+            </a:solidFill>
           </a:ln>
         </p:spPr>
-        <p:txBody>
-          <a:bodyPr rtlCol="0" anchor="ctr"/>
-          <a:lstStyle/>
-          <a:p>
-            <a:pPr algn="ctr"/>
-          </a:p>
-        </p:txBody>
-      </p:sp>
-      <p:sp>
-        <p:nvSpPr>
-          <p:cNvPr id="6" name="텍스트"/>
+      </p:cxnSp>
+      <p:sp>
+        <p:nvSpPr>
+          <p:cNvPr id="15" name="텍스트"/>
           <p:cNvSpPr txBox="1"/>
           <p:nvPr/>
         </p:nvSpPr>
         <p:spPr>
           <a:xfrm>
-            <a:off x="360000" y="1267200"/>
-            <a:ext cx="2520000" cy="133351"/>
+            <a:off x="360000" y="1101600"/>
+            <a:ext cx="2520000" cy="123826"/>
           </a:xfrm>
           <a:prstGeom prst="rect">
             <a:avLst/>
@@ -3259,32 +3459,72 @@
           <a:p>
             <a:pPr algn="ctr">
               <a:lnSpc>
-                <a:spcPts val="1015"/>
+                <a:spcPts val="942"/>
               </a:lnSpc>
             </a:pPr>
             <a:r>
-              <a:rPr sz="700" b="0">
+              <a:rPr sz="650" b="1" spc="220">
+                <a:solidFill>
+                  <a:srgbClr val="0B3A72"/>
+                </a:solidFill>
+                <a:latin typeface="맑은 고딕"/>
+                <a:ea typeface="맑은 고딕"/>
+              </a:rPr>
+              <a:t>상호명</a:t>
+            </a:r>
+          </a:p>
+        </p:txBody>
+      </p:sp>
+      <p:sp>
+        <p:nvSpPr>
+          <p:cNvPr id="16" name="텍스트"/>
+          <p:cNvSpPr txBox="1"/>
+          <p:nvPr/>
+        </p:nvSpPr>
+        <p:spPr>
+          <a:xfrm>
+            <a:off x="360000" y="1339200"/>
+            <a:ext cx="2520000" cy="123826"/>
+          </a:xfrm>
+          <a:prstGeom prst="rect">
+            <a:avLst/>
+          </a:prstGeom>
+          <a:noFill/>
+        </p:spPr>
+        <p:txBody>
+          <a:bodyPr wrap="square" lIns="0" rIns="0" tIns="0" bIns="0" anchor="t">
+            <a:spAutoFit/>
+          </a:bodyPr>
+          <a:lstStyle/>
+          <a:p>
+            <a:pPr algn="ctr">
+              <a:lnSpc>
+                <a:spcPts val="942"/>
+              </a:lnSpc>
+            </a:pPr>
+            <a:r>
+              <a:rPr sz="650" b="0">
                 <a:solidFill>
                   <a:srgbClr val="12151C"/>
                 </a:solidFill>
                 <a:latin typeface="맑은 고딕"/>
                 <a:ea typeface="맑은 고딕"/>
               </a:rPr>
-              <a:t>010-1234-5678      name@example.com</a:t>
-            </a:r>
-          </a:p>
-        </p:txBody>
-      </p:sp>
-      <p:sp>
-        <p:nvSpPr>
-          <p:cNvPr id="7" name="텍스트"/>
+              <a:t>010-1234-5678     |     name@example.com</a:t>
+            </a:r>
+          </a:p>
+        </p:txBody>
+      </p:sp>
+      <p:sp>
+        <p:nvSpPr>
+          <p:cNvPr id="17" name="텍스트"/>
           <p:cNvSpPr txBox="1"/>
           <p:nvPr/>
         </p:nvSpPr>
         <p:spPr>
           <a:xfrm>
-            <a:off x="360000" y="1425600"/>
-            <a:ext cx="2520000" cy="133351"/>
+            <a:off x="360000" y="1476000"/>
+            <a:ext cx="2520000" cy="123826"/>
           </a:xfrm>
           <a:prstGeom prst="rect">
             <a:avLst/>
@@ -3299,11 +3539,11 @@
           <a:p>
             <a:pPr algn="ctr">
               <a:lnSpc>
-                <a:spcPts val="1015"/>
+                <a:spcPts val="942"/>
               </a:lnSpc>
             </a:pPr>
             <a:r>
-              <a:rPr sz="700" b="0">
+              <a:rPr sz="650" b="0">
                 <a:solidFill>
                   <a:srgbClr val="0B3A72"/>
                 </a:solidFill>
@@ -3311,46 +3551,6 @@
                 <a:ea typeface="맑은 고딕"/>
               </a:rPr>
               <a:t>주소를 입력해 주세요</a:t>
-            </a:r>
-          </a:p>
-        </p:txBody>
-      </p:sp>
-      <p:sp>
-        <p:nvSpPr>
-          <p:cNvPr id="8" name="텍스트"/>
-          <p:cNvSpPr txBox="1"/>
-          <p:nvPr/>
-        </p:nvSpPr>
-        <p:spPr>
-          <a:xfrm>
-            <a:off x="360000" y="1576800"/>
-            <a:ext cx="2520000" cy="104776"/>
-          </a:xfrm>
-          <a:prstGeom prst="rect">
-            <a:avLst/>
-          </a:prstGeom>
-          <a:noFill/>
-        </p:spPr>
-        <p:txBody>
-          <a:bodyPr wrap="square" lIns="0" rIns="0" tIns="0" bIns="0" anchor="t">
-            <a:spAutoFit/>
-          </a:bodyPr>
-          <a:lstStyle/>
-          <a:p>
-            <a:pPr algn="ctr">
-              <a:lnSpc>
-                <a:spcPts val="797"/>
-              </a:lnSpc>
-            </a:pPr>
-            <a:r>
-              <a:rPr sz="550" b="1" spc="300">
-                <a:solidFill>
-                  <a:srgbClr val="0B3A72"/>
-                </a:solidFill>
-                <a:latin typeface="맑은 고딕"/>
-                <a:ea typeface="맑은 고딕"/>
-              </a:rPr>
-              <a:t>상호명</a:t>
             </a:r>
           </a:p>
         </p:txBody>
@@ -3381,18 +3581,226 @@
         <p:nvPr/>
       </p:nvGrpSpPr>
       <p:grpSpPr/>
-      <p:sp>
-        <p:nvSpPr>
-          <p:cNvPr id="2" name="Oval 1"/>
+      <p:cxnSp>
+        <p:nvCxnSpPr>
+          <p:cNvPr id="2" name="Connector 1"/>
+          <p:cNvCxnSpPr/>
+          <p:nvPr/>
+        </p:nvCxnSpPr>
+        <p:spPr>
+          <a:xfrm>
+            <a:off x="93600" y="122400"/>
+            <a:ext cx="57600" cy="0"/>
+          </a:xfrm>
+          <a:prstGeom prst="line">
+            <a:avLst/>
+          </a:prstGeom>
+          <a:ln w="3600">
+            <a:solidFill>
+              <a:srgbClr val="B8D9FF"/>
+            </a:solidFill>
+          </a:ln>
+        </p:spPr>
+      </p:cxnSp>
+      <p:cxnSp>
+        <p:nvCxnSpPr>
+          <p:cNvPr id="3" name="Connector 2"/>
+          <p:cNvCxnSpPr/>
+          <p:nvPr/>
+        </p:nvCxnSpPr>
+        <p:spPr>
+          <a:xfrm>
+            <a:off x="122400" y="93600"/>
+            <a:ext cx="0" cy="57600"/>
+          </a:xfrm>
+          <a:prstGeom prst="line">
+            <a:avLst/>
+          </a:prstGeom>
+          <a:ln w="3600">
+            <a:solidFill>
+              <a:srgbClr val="B8D9FF"/>
+            </a:solidFill>
+          </a:ln>
+        </p:spPr>
+      </p:cxnSp>
+      <p:cxnSp>
+        <p:nvCxnSpPr>
+          <p:cNvPr id="4" name="Connector 3"/>
+          <p:cNvCxnSpPr/>
+          <p:nvPr/>
+        </p:nvCxnSpPr>
+        <p:spPr>
+          <a:xfrm>
+            <a:off x="3088800" y="122400"/>
+            <a:ext cx="57600" cy="0"/>
+          </a:xfrm>
+          <a:prstGeom prst="line">
+            <a:avLst/>
+          </a:prstGeom>
+          <a:ln w="3600">
+            <a:solidFill>
+              <a:srgbClr val="B8D9FF"/>
+            </a:solidFill>
+          </a:ln>
+        </p:spPr>
+      </p:cxnSp>
+      <p:cxnSp>
+        <p:nvCxnSpPr>
+          <p:cNvPr id="5" name="Connector 4"/>
+          <p:cNvCxnSpPr/>
+          <p:nvPr/>
+        </p:nvCxnSpPr>
+        <p:spPr>
+          <a:xfrm>
+            <a:off x="3117600" y="93600"/>
+            <a:ext cx="0" cy="57600"/>
+          </a:xfrm>
+          <a:prstGeom prst="line">
+            <a:avLst/>
+          </a:prstGeom>
+          <a:ln w="3600">
+            <a:solidFill>
+              <a:srgbClr val="B8D9FF"/>
+            </a:solidFill>
+          </a:ln>
+        </p:spPr>
+      </p:cxnSp>
+      <p:cxnSp>
+        <p:nvCxnSpPr>
+          <p:cNvPr id="6" name="Connector 5"/>
+          <p:cNvCxnSpPr/>
+          <p:nvPr/>
+        </p:nvCxnSpPr>
+        <p:spPr>
+          <a:xfrm>
+            <a:off x="93600" y="1677600"/>
+            <a:ext cx="57600" cy="0"/>
+          </a:xfrm>
+          <a:prstGeom prst="line">
+            <a:avLst/>
+          </a:prstGeom>
+          <a:ln w="3600">
+            <a:solidFill>
+              <a:srgbClr val="B8D9FF"/>
+            </a:solidFill>
+          </a:ln>
+        </p:spPr>
+      </p:cxnSp>
+      <p:cxnSp>
+        <p:nvCxnSpPr>
+          <p:cNvPr id="7" name="Connector 6"/>
+          <p:cNvCxnSpPr/>
+          <p:nvPr/>
+        </p:nvCxnSpPr>
+        <p:spPr>
+          <a:xfrm>
+            <a:off x="122400" y="1648800"/>
+            <a:ext cx="0" cy="57600"/>
+          </a:xfrm>
+          <a:prstGeom prst="line">
+            <a:avLst/>
+          </a:prstGeom>
+          <a:ln w="3600">
+            <a:solidFill>
+              <a:srgbClr val="B8D9FF"/>
+            </a:solidFill>
+          </a:ln>
+        </p:spPr>
+      </p:cxnSp>
+      <p:cxnSp>
+        <p:nvCxnSpPr>
+          <p:cNvPr id="8" name="Connector 7"/>
+          <p:cNvCxnSpPr/>
+          <p:nvPr/>
+        </p:nvCxnSpPr>
+        <p:spPr>
+          <a:xfrm>
+            <a:off x="3088800" y="1677600"/>
+            <a:ext cx="57600" cy="0"/>
+          </a:xfrm>
+          <a:prstGeom prst="line">
+            <a:avLst/>
+          </a:prstGeom>
+          <a:ln w="3600">
+            <a:solidFill>
+              <a:srgbClr val="B8D9FF"/>
+            </a:solidFill>
+          </a:ln>
+        </p:spPr>
+      </p:cxnSp>
+      <p:cxnSp>
+        <p:nvCxnSpPr>
+          <p:cNvPr id="9" name="Connector 8"/>
+          <p:cNvCxnSpPr/>
+          <p:nvPr/>
+        </p:nvCxnSpPr>
+        <p:spPr>
+          <a:xfrm>
+            <a:off x="3117600" y="1648800"/>
+            <a:ext cx="0" cy="57600"/>
+          </a:xfrm>
+          <a:prstGeom prst="line">
+            <a:avLst/>
+          </a:prstGeom>
+          <a:ln w="3600">
+            <a:solidFill>
+              <a:srgbClr val="B8D9FF"/>
+            </a:solidFill>
+          </a:ln>
+        </p:spPr>
+      </p:cxnSp>
+      <p:sp>
+        <p:nvSpPr>
+          <p:cNvPr id="10" name="텍스트"/>
+          <p:cNvSpPr txBox="1"/>
+          <p:nvPr/>
+        </p:nvSpPr>
+        <p:spPr>
+          <a:xfrm>
+            <a:off x="360000" y="331200"/>
+            <a:ext cx="2520000" cy="99061"/>
+          </a:xfrm>
+          <a:prstGeom prst="rect">
+            <a:avLst/>
+          </a:prstGeom>
+          <a:noFill/>
+        </p:spPr>
+        <p:txBody>
+          <a:bodyPr wrap="square" lIns="0" rIns="0" tIns="0" bIns="0" anchor="t">
+            <a:spAutoFit/>
+          </a:bodyPr>
+          <a:lstStyle/>
+          <a:p>
+            <a:pPr algn="ctr">
+              <a:lnSpc>
+                <a:spcPts val="754"/>
+              </a:lnSpc>
+            </a:pPr>
+            <a:r>
+              <a:rPr sz="520" b="1" spc="240">
+                <a:solidFill>
+                  <a:srgbClr val="0B3A72"/>
+                </a:solidFill>
+                <a:latin typeface="맑은 고딕"/>
+                <a:ea typeface="맑은 고딕"/>
+              </a:rPr>
+              <a:t>대표 메뉴</a:t>
+            </a:r>
+          </a:p>
+        </p:txBody>
+      </p:sp>
+      <p:sp>
+        <p:nvSpPr>
+          <p:cNvPr id="11" name="Rectangle 10"/>
           <p:cNvSpPr/>
           <p:nvPr/>
         </p:nvSpPr>
         <p:spPr>
           <a:xfrm>
-            <a:off x="1591200" y="511200"/>
-            <a:ext cx="57600" cy="57600"/>
-          </a:xfrm>
-          <a:prstGeom prst="ellipse">
+            <a:off x="1530000" y="453600"/>
+            <a:ext cx="180000" cy="14400"/>
+          </a:xfrm>
+          <a:prstGeom prst="rect">
             <a:avLst/>
           </a:prstGeom>
           <a:solidFill>
@@ -3412,14 +3820,14 @@
       </p:sp>
       <p:sp>
         <p:nvSpPr>
-          <p:cNvPr id="3" name="텍스트"/>
+          <p:cNvPr id="12" name="텍스트"/>
           <p:cNvSpPr txBox="1"/>
           <p:nvPr/>
         </p:nvSpPr>
         <p:spPr>
           <a:xfrm>
-            <a:off x="396000" y="684000"/>
-            <a:ext cx="2448000" cy="504000"/>
+            <a:off x="360000" y="684000"/>
+            <a:ext cx="630000" cy="216000"/>
           </a:xfrm>
           <a:prstGeom prst="rect">
             <a:avLst/>
@@ -3427,38 +3835,322 @@
           <a:noFill/>
         </p:spPr>
         <p:txBody>
-          <a:bodyPr wrap="square" lIns="0" rIns="0" tIns="0" bIns="0" anchor="t">
+          <a:bodyPr wrap="square" lIns="0" rIns="0" tIns="0" bIns="0" anchor="ctr">
             <a:spAutoFit/>
           </a:bodyPr>
           <a:lstStyle/>
           <a:p>
             <a:pPr algn="ctr">
               <a:lnSpc>
-                <a:spcPts val="1739"/>
+                <a:spcPts val="1015"/>
               </a:lnSpc>
             </a:pPr>
             <a:r>
-              <a:rPr sz="1200" b="1">
+              <a:rPr sz="700" b="1">
                 <a:solidFill>
                   <a:srgbClr val="12151C"/>
                 </a:solidFill>
                 <a:latin typeface="맑은 고딕"/>
                 <a:ea typeface="맑은 고딕"/>
               </a:rPr>
-              <a:t>맛있는 이야기가 있는 식탁</a:t>
-            </a:r>
-          </a:p>
-        </p:txBody>
-      </p:sp>
-      <p:sp>
-        <p:nvSpPr>
-          <p:cNvPr id="4" name="텍스트"/>
+              <a:t>아메리카노</a:t>
+            </a:r>
+          </a:p>
+        </p:txBody>
+      </p:sp>
+      <p:sp>
+        <p:nvSpPr>
+          <p:cNvPr id="13" name="텍스트"/>
           <p:cNvSpPr txBox="1"/>
           <p:nvPr/>
         </p:nvSpPr>
         <p:spPr>
           <a:xfrm>
-            <a:off x="360000" y="1339200"/>
+            <a:off x="990000" y="684000"/>
+            <a:ext cx="630000" cy="216000"/>
+          </a:xfrm>
+          <a:prstGeom prst="rect">
+            <a:avLst/>
+          </a:prstGeom>
+          <a:noFill/>
+        </p:spPr>
+        <p:txBody>
+          <a:bodyPr wrap="square" lIns="0" rIns="0" tIns="0" bIns="0" anchor="ctr">
+            <a:spAutoFit/>
+          </a:bodyPr>
+          <a:lstStyle/>
+          <a:p>
+            <a:pPr algn="ctr">
+              <a:lnSpc>
+                <a:spcPts val="1015"/>
+              </a:lnSpc>
+            </a:pPr>
+            <a:r>
+              <a:rPr sz="700" b="1">
+                <a:solidFill>
+                  <a:srgbClr val="12151C"/>
+                </a:solidFill>
+                <a:latin typeface="맑은 고딕"/>
+                <a:ea typeface="맑은 고딕"/>
+              </a:rPr>
+              <a:t>핸드드립</a:t>
+            </a:r>
+          </a:p>
+        </p:txBody>
+      </p:sp>
+      <p:cxnSp>
+        <p:nvCxnSpPr>
+          <p:cNvPr id="14" name="Connector 13"/>
+          <p:cNvCxnSpPr/>
+          <p:nvPr/>
+        </p:nvCxnSpPr>
+        <p:spPr>
+          <a:xfrm>
+            <a:off x="990000" y="676800"/>
+            <a:ext cx="0" cy="230400"/>
+          </a:xfrm>
+          <a:prstGeom prst="line">
+            <a:avLst/>
+          </a:prstGeom>
+          <a:ln w="3600">
+            <a:solidFill>
+              <a:srgbClr val="B8D9FF"/>
+            </a:solidFill>
+          </a:ln>
+        </p:spPr>
+      </p:cxnSp>
+      <p:sp>
+        <p:nvSpPr>
+          <p:cNvPr id="15" name="텍스트"/>
+          <p:cNvSpPr txBox="1"/>
+          <p:nvPr/>
+        </p:nvSpPr>
+        <p:spPr>
+          <a:xfrm>
+            <a:off x="1620000" y="684000"/>
+            <a:ext cx="630000" cy="216000"/>
+          </a:xfrm>
+          <a:prstGeom prst="rect">
+            <a:avLst/>
+          </a:prstGeom>
+          <a:noFill/>
+        </p:spPr>
+        <p:txBody>
+          <a:bodyPr wrap="square" lIns="0" rIns="0" tIns="0" bIns="0" anchor="ctr">
+            <a:spAutoFit/>
+          </a:bodyPr>
+          <a:lstStyle/>
+          <a:p>
+            <a:pPr algn="ctr">
+              <a:lnSpc>
+                <a:spcPts val="1015"/>
+              </a:lnSpc>
+            </a:pPr>
+            <a:r>
+              <a:rPr sz="700" b="1">
+                <a:solidFill>
+                  <a:srgbClr val="12151C"/>
+                </a:solidFill>
+                <a:latin typeface="맑은 고딕"/>
+                <a:ea typeface="맑은 고딕"/>
+              </a:rPr>
+              <a:t>수제청</a:t>
+            </a:r>
+          </a:p>
+        </p:txBody>
+      </p:sp>
+      <p:cxnSp>
+        <p:nvCxnSpPr>
+          <p:cNvPr id="16" name="Connector 15"/>
+          <p:cNvCxnSpPr/>
+          <p:nvPr/>
+        </p:nvCxnSpPr>
+        <p:spPr>
+          <a:xfrm>
+            <a:off x="1620000" y="676800"/>
+            <a:ext cx="0" cy="230400"/>
+          </a:xfrm>
+          <a:prstGeom prst="line">
+            <a:avLst/>
+          </a:prstGeom>
+          <a:ln w="3600">
+            <a:solidFill>
+              <a:srgbClr val="B8D9FF"/>
+            </a:solidFill>
+          </a:ln>
+        </p:spPr>
+      </p:cxnSp>
+      <p:sp>
+        <p:nvSpPr>
+          <p:cNvPr id="17" name="텍스트"/>
+          <p:cNvSpPr txBox="1"/>
+          <p:nvPr/>
+        </p:nvSpPr>
+        <p:spPr>
+          <a:xfrm>
+            <a:off x="2250000" y="684000"/>
+            <a:ext cx="630000" cy="216000"/>
+          </a:xfrm>
+          <a:prstGeom prst="rect">
+            <a:avLst/>
+          </a:prstGeom>
+          <a:noFill/>
+        </p:spPr>
+        <p:txBody>
+          <a:bodyPr wrap="square" lIns="0" rIns="0" tIns="0" bIns="0" anchor="ctr">
+            <a:spAutoFit/>
+          </a:bodyPr>
+          <a:lstStyle/>
+          <a:p>
+            <a:pPr algn="ctr">
+              <a:lnSpc>
+                <a:spcPts val="1015"/>
+              </a:lnSpc>
+            </a:pPr>
+            <a:r>
+              <a:rPr sz="700" b="1">
+                <a:solidFill>
+                  <a:srgbClr val="12151C"/>
+                </a:solidFill>
+                <a:latin typeface="맑은 고딕"/>
+                <a:ea typeface="맑은 고딕"/>
+              </a:rPr>
+              <a:t>시즌 메뉴</a:t>
+            </a:r>
+          </a:p>
+        </p:txBody>
+      </p:sp>
+      <p:cxnSp>
+        <p:nvCxnSpPr>
+          <p:cNvPr id="18" name="Connector 17"/>
+          <p:cNvCxnSpPr/>
+          <p:nvPr/>
+        </p:nvCxnSpPr>
+        <p:spPr>
+          <a:xfrm>
+            <a:off x="2250000" y="676800"/>
+            <a:ext cx="0" cy="230400"/>
+          </a:xfrm>
+          <a:prstGeom prst="line">
+            <a:avLst/>
+          </a:prstGeom>
+          <a:ln w="3600">
+            <a:solidFill>
+              <a:srgbClr val="B8D9FF"/>
+            </a:solidFill>
+          </a:ln>
+        </p:spPr>
+      </p:cxnSp>
+      <p:cxnSp>
+        <p:nvCxnSpPr>
+          <p:cNvPr id="19" name="Connector 18"/>
+          <p:cNvCxnSpPr/>
+          <p:nvPr/>
+        </p:nvCxnSpPr>
+        <p:spPr>
+          <a:xfrm>
+            <a:off x="360000" y="1159200"/>
+            <a:ext cx="2520000" cy="0"/>
+          </a:xfrm>
+          <a:prstGeom prst="line">
+            <a:avLst/>
+          </a:prstGeom>
+          <a:ln w="3600">
+            <a:solidFill>
+              <a:srgbClr val="B8D9FF"/>
+            </a:solidFill>
+          </a:ln>
+        </p:spPr>
+      </p:cxnSp>
+      <p:sp>
+        <p:nvSpPr>
+          <p:cNvPr id="20" name="텍스트"/>
+          <p:cNvSpPr txBox="1"/>
+          <p:nvPr/>
+        </p:nvSpPr>
+        <p:spPr>
+          <a:xfrm>
+            <a:off x="360000" y="1245600"/>
+            <a:ext cx="1224000" cy="118111"/>
+          </a:xfrm>
+          <a:prstGeom prst="rect">
+            <a:avLst/>
+          </a:prstGeom>
+          <a:noFill/>
+        </p:spPr>
+        <p:txBody>
+          <a:bodyPr wrap="square" lIns="0" rIns="0" tIns="0" bIns="0" anchor="t">
+            <a:spAutoFit/>
+          </a:bodyPr>
+          <a:lstStyle/>
+          <a:p>
+            <a:pPr algn="ctr">
+              <a:lnSpc>
+                <a:spcPts val="899"/>
+              </a:lnSpc>
+            </a:pPr>
+            <a:r>
+              <a:rPr sz="620" b="0">
+                <a:solidFill>
+                  <a:srgbClr val="12151C"/>
+                </a:solidFill>
+                <a:latin typeface="맑은 고딕"/>
+                <a:ea typeface="맑은 고딕"/>
+              </a:rPr>
+              <a:t>화–일 11:00 – 21:00</a:t>
+            </a:r>
+          </a:p>
+        </p:txBody>
+      </p:sp>
+      <p:sp>
+        <p:nvSpPr>
+          <p:cNvPr id="21" name="텍스트"/>
+          <p:cNvSpPr txBox="1"/>
+          <p:nvPr/>
+        </p:nvSpPr>
+        <p:spPr>
+          <a:xfrm>
+            <a:off x="1656000" y="1245600"/>
+            <a:ext cx="1224000" cy="118111"/>
+          </a:xfrm>
+          <a:prstGeom prst="rect">
+            <a:avLst/>
+          </a:prstGeom>
+          <a:noFill/>
+        </p:spPr>
+        <p:txBody>
+          <a:bodyPr wrap="square" lIns="0" rIns="0" tIns="0" bIns="0" anchor="t">
+            <a:spAutoFit/>
+          </a:bodyPr>
+          <a:lstStyle/>
+          <a:p>
+            <a:pPr algn="ctr">
+              <a:lnSpc>
+                <a:spcPts val="899"/>
+              </a:lnSpc>
+            </a:pPr>
+            <a:r>
+              <a:rPr sz="620" b="0">
+                <a:solidFill>
+                  <a:srgbClr val="12151C"/>
+                </a:solidFill>
+                <a:latin typeface="맑은 고딕"/>
+                <a:ea typeface="맑은 고딕"/>
+              </a:rPr>
+              <a:t>INSTAGRAM  @아이디</a:t>
+            </a:r>
+          </a:p>
+        </p:txBody>
+      </p:sp>
+      <p:sp>
+        <p:nvSpPr>
+          <p:cNvPr id="22" name="텍스트"/>
+          <p:cNvSpPr txBox="1"/>
+          <p:nvPr/>
+        </p:nvSpPr>
+        <p:spPr>
+          <a:xfrm>
+            <a:off x="360000" y="1526400"/>
             <a:ext cx="2520000" cy="123826"/>
           </a:xfrm>
           <a:prstGeom prst="rect">
@@ -3478,7 +4170,7 @@
               </a:lnSpc>
             </a:pPr>
             <a:r>
-              <a:rPr sz="650" b="1" spc="300">
+              <a:rPr sz="650" b="1" spc="220">
                 <a:solidFill>
                   <a:srgbClr val="0B3A72"/>
                 </a:solidFill>
